--- a/research/presentation/out/slides.pptx
+++ b/research/presentation/out/slides.pptx
@@ -534,7 +534,7 @@
           <a:p>
             <a:pPr/>
             <a:r>
-              <a:t>This deck summarises research/promise-normalization.md and research/promise-coverage-audit.md. Nothing in it is implemented; laws are argued, not mechanized.</a:t>
+              <a:t>This deck accompanies the promise-resolution pull request and summarises research/promise-normalization.md and research/promise-coverage-audit.md. The native contracts and the generic descriptors are implemented and checked in Lean; the generic forms not yet supported are recorded as gaps.</a:t>
             </a:r>
           </a:p>
         </p:txBody>
@@ -674,7 +674,7 @@
           <a:p>
             <a:pPr/>
             <a:r>
-              <a:t>Status as the implementation reports it, not yet committed. The associated-result case verifies end to end. The generic wrap with return await still waits for await and return inside generic bodies. All refused programs are refused; eight negative cases are refused earlier than their intended obligation or with a different message, which the remaining work settles.</a:t>
+              <a:t>The associated-result case and the number-bounded wrap verify end to end. The generic wrap with return await and back are recorded gaps. Every unsafe program is refused; eight negative cases are refused before their intended check, and are recorded as gaps too.</a:t>
             </a:r>
           </a:p>
         </p:txBody>
@@ -744,7 +744,7 @@
           <a:p>
             <a:pPr/>
             <a:r>
-              <a:t>Before: skjs-coverage.json on verification/graph-core. The array unit verifies in the implementation's stable-await case. A full census rerun follows the commit.</a:t>
+              <a:t>Before: skjs-coverage.json on verification/graph-core. The array unit verifies in the implementation's stable-await case. The census has not been rerun.</a:t>
             </a:r>
           </a:p>
         </p:txBody>
@@ -1304,7 +1304,7 @@
           <a:p>
             <a:pPr/>
             <a:r>
-              <a:t>This is the meaning of a qualified scheme in codex's semantics (descriptorDomain in ResolutionDescriptors.lean): the scheme's reassignments are restricted to coherent descriptor tuples. A call supplies one such tuple, a descriptor. The relations are fixed outside the recursive type graph.</a:t>
+              <a:t>This is the meaning of a qualified scheme in the implementation (descriptorDomain in ResolutionDescriptors.lean): the scheme's reassignments are restricted to coherent descriptor tuples. A call supplies one such tuple, a descriptor. The relations are fixed outside the recursive type graph.</a:t>
             </a:r>
           </a:p>
         </p:txBody>

--- a/research/presentation/out/slides.pptx
+++ b/research/presentation/out/slides.pptx
@@ -1304,7 +1304,7 @@
           <a:p>
             <a:pPr/>
             <a:r>
-              <a:t>This is the meaning of a qualified scheme in the implementation (descriptorDomain in ResolutionDescriptors.lean): the scheme's reassignments are restricted to coherent descriptor tuples. A call supplies one such tuple, a descriptor. The relations are fixed outside the recursive type graph.</a:t>
+              <a:t>The elaborated signature is notation for what the implementation records: a type parameter with resolution slots (the fragment's resolution field, a resolution descriptor in the request). The implied-bounds rules are stated in SOURCE-CONTRACTS.md, section Implied bounds.</a:t>
             </a:r>
           </a:p>
         </p:txBody>
@@ -1374,7 +1374,7 @@
           <a:p>
             <a:pPr/>
             <a:r>
-              <a:t>These are the inductive relations Resolves and Observes in ResolutionCapabilities.lean. A type with no derivation, such as an open record, has no descriptor, so a generic instantiation at it is refused.</a:t>
+              <a:t>These are the inductive relations Resolves and Observes in ResolutionCapabilities.lean, read as computing the associated types. A type with no classification, such as an open record, makes the call refused.</a:t>
             </a:r>
           </a:p>
         </p:txBody>

--- a/research/presentation/out/slides.pptx
+++ b/research/presentation/out/slides.pptx
@@ -76,9 +76,9 @@
         </a:solidFill>
         <a:effectLst/>
         <a:uFillTx/>
-        <a:latin typeface="+mj-lt"/>
-        <a:ea typeface="+mj-ea"/>
-        <a:cs typeface="+mj-cs"/>
+        <a:latin typeface="+mn-lt"/>
+        <a:ea typeface="+mn-ea"/>
+        <a:cs typeface="+mn-cs"/>
         <a:sym typeface="Calibri"/>
       </a:defRPr>
     </a:lvl1pPr>
@@ -106,9 +106,9 @@
         </a:solidFill>
         <a:effectLst/>
         <a:uFillTx/>
-        <a:latin typeface="+mj-lt"/>
-        <a:ea typeface="+mj-ea"/>
-        <a:cs typeface="+mj-cs"/>
+        <a:latin typeface="+mn-lt"/>
+        <a:ea typeface="+mn-ea"/>
+        <a:cs typeface="+mn-cs"/>
         <a:sym typeface="Calibri"/>
       </a:defRPr>
     </a:lvl2pPr>
@@ -136,9 +136,9 @@
         </a:solidFill>
         <a:effectLst/>
         <a:uFillTx/>
-        <a:latin typeface="+mj-lt"/>
-        <a:ea typeface="+mj-ea"/>
-        <a:cs typeface="+mj-cs"/>
+        <a:latin typeface="+mn-lt"/>
+        <a:ea typeface="+mn-ea"/>
+        <a:cs typeface="+mn-cs"/>
         <a:sym typeface="Calibri"/>
       </a:defRPr>
     </a:lvl3pPr>
@@ -166,9 +166,9 @@
         </a:solidFill>
         <a:effectLst/>
         <a:uFillTx/>
-        <a:latin typeface="+mj-lt"/>
-        <a:ea typeface="+mj-ea"/>
-        <a:cs typeface="+mj-cs"/>
+        <a:latin typeface="+mn-lt"/>
+        <a:ea typeface="+mn-ea"/>
+        <a:cs typeface="+mn-cs"/>
         <a:sym typeface="Calibri"/>
       </a:defRPr>
     </a:lvl4pPr>
@@ -196,9 +196,9 @@
         </a:solidFill>
         <a:effectLst/>
         <a:uFillTx/>
-        <a:latin typeface="+mj-lt"/>
-        <a:ea typeface="+mj-ea"/>
-        <a:cs typeface="+mj-cs"/>
+        <a:latin typeface="+mn-lt"/>
+        <a:ea typeface="+mn-ea"/>
+        <a:cs typeface="+mn-cs"/>
         <a:sym typeface="Calibri"/>
       </a:defRPr>
     </a:lvl5pPr>
@@ -226,9 +226,9 @@
         </a:solidFill>
         <a:effectLst/>
         <a:uFillTx/>
-        <a:latin typeface="+mj-lt"/>
-        <a:ea typeface="+mj-ea"/>
-        <a:cs typeface="+mj-cs"/>
+        <a:latin typeface="+mn-lt"/>
+        <a:ea typeface="+mn-ea"/>
+        <a:cs typeface="+mn-cs"/>
         <a:sym typeface="Calibri"/>
       </a:defRPr>
     </a:lvl6pPr>
@@ -256,9 +256,9 @@
         </a:solidFill>
         <a:effectLst/>
         <a:uFillTx/>
-        <a:latin typeface="+mj-lt"/>
-        <a:ea typeface="+mj-ea"/>
-        <a:cs typeface="+mj-cs"/>
+        <a:latin typeface="+mn-lt"/>
+        <a:ea typeface="+mn-ea"/>
+        <a:cs typeface="+mn-cs"/>
         <a:sym typeface="Calibri"/>
       </a:defRPr>
     </a:lvl7pPr>
@@ -286,9 +286,9 @@
         </a:solidFill>
         <a:effectLst/>
         <a:uFillTx/>
-        <a:latin typeface="+mj-lt"/>
-        <a:ea typeface="+mj-ea"/>
-        <a:cs typeface="+mj-cs"/>
+        <a:latin typeface="+mn-lt"/>
+        <a:ea typeface="+mn-ea"/>
+        <a:cs typeface="+mn-cs"/>
         <a:sym typeface="Calibri"/>
       </a:defRPr>
     </a:lvl8pPr>
@@ -316,9 +316,9 @@
         </a:solidFill>
         <a:effectLst/>
         <a:uFillTx/>
-        <a:latin typeface="+mj-lt"/>
-        <a:ea typeface="+mj-ea"/>
-        <a:cs typeface="+mj-cs"/>
+        <a:latin typeface="+mn-lt"/>
+        <a:ea typeface="+mn-ea"/>
+        <a:cs typeface="+mn-cs"/>
         <a:sym typeface="Calibri"/>
       </a:defRPr>
     </a:lvl9pPr>
@@ -403,73 +403,73 @@
   <p:notesStyle>
     <a:lvl1pPr defTabSz="457200" latinLnBrk="0">
       <a:defRPr sz="1200">
-        <a:latin typeface="+mj-lt"/>
-        <a:ea typeface="+mj-ea"/>
-        <a:cs typeface="+mj-cs"/>
+        <a:latin typeface="+mn-lt"/>
+        <a:ea typeface="+mn-ea"/>
+        <a:cs typeface="+mn-cs"/>
         <a:sym typeface="Calibri"/>
       </a:defRPr>
     </a:lvl1pPr>
     <a:lvl2pPr indent="228600" defTabSz="457200" latinLnBrk="0">
       <a:defRPr sz="1200">
-        <a:latin typeface="+mj-lt"/>
-        <a:ea typeface="+mj-ea"/>
-        <a:cs typeface="+mj-cs"/>
+        <a:latin typeface="+mn-lt"/>
+        <a:ea typeface="+mn-ea"/>
+        <a:cs typeface="+mn-cs"/>
         <a:sym typeface="Calibri"/>
       </a:defRPr>
     </a:lvl2pPr>
     <a:lvl3pPr indent="457200" defTabSz="457200" latinLnBrk="0">
       <a:defRPr sz="1200">
-        <a:latin typeface="+mj-lt"/>
-        <a:ea typeface="+mj-ea"/>
-        <a:cs typeface="+mj-cs"/>
+        <a:latin typeface="+mn-lt"/>
+        <a:ea typeface="+mn-ea"/>
+        <a:cs typeface="+mn-cs"/>
         <a:sym typeface="Calibri"/>
       </a:defRPr>
     </a:lvl3pPr>
     <a:lvl4pPr indent="685800" defTabSz="457200" latinLnBrk="0">
       <a:defRPr sz="1200">
-        <a:latin typeface="+mj-lt"/>
-        <a:ea typeface="+mj-ea"/>
-        <a:cs typeface="+mj-cs"/>
+        <a:latin typeface="+mn-lt"/>
+        <a:ea typeface="+mn-ea"/>
+        <a:cs typeface="+mn-cs"/>
         <a:sym typeface="Calibri"/>
       </a:defRPr>
     </a:lvl4pPr>
     <a:lvl5pPr indent="914400" defTabSz="457200" latinLnBrk="0">
       <a:defRPr sz="1200">
-        <a:latin typeface="+mj-lt"/>
-        <a:ea typeface="+mj-ea"/>
-        <a:cs typeface="+mj-cs"/>
+        <a:latin typeface="+mn-lt"/>
+        <a:ea typeface="+mn-ea"/>
+        <a:cs typeface="+mn-cs"/>
         <a:sym typeface="Calibri"/>
       </a:defRPr>
     </a:lvl5pPr>
     <a:lvl6pPr indent="1143000" defTabSz="457200" latinLnBrk="0">
       <a:defRPr sz="1200">
-        <a:latin typeface="+mj-lt"/>
-        <a:ea typeface="+mj-ea"/>
-        <a:cs typeface="+mj-cs"/>
+        <a:latin typeface="+mn-lt"/>
+        <a:ea typeface="+mn-ea"/>
+        <a:cs typeface="+mn-cs"/>
         <a:sym typeface="Calibri"/>
       </a:defRPr>
     </a:lvl6pPr>
     <a:lvl7pPr indent="1371600" defTabSz="457200" latinLnBrk="0">
       <a:defRPr sz="1200">
-        <a:latin typeface="+mj-lt"/>
-        <a:ea typeface="+mj-ea"/>
-        <a:cs typeface="+mj-cs"/>
+        <a:latin typeface="+mn-lt"/>
+        <a:ea typeface="+mn-ea"/>
+        <a:cs typeface="+mn-cs"/>
         <a:sym typeface="Calibri"/>
       </a:defRPr>
     </a:lvl7pPr>
     <a:lvl8pPr indent="1600200" defTabSz="457200" latinLnBrk="0">
       <a:defRPr sz="1200">
-        <a:latin typeface="+mj-lt"/>
-        <a:ea typeface="+mj-ea"/>
-        <a:cs typeface="+mj-cs"/>
+        <a:latin typeface="+mn-lt"/>
+        <a:ea typeface="+mn-ea"/>
+        <a:cs typeface="+mn-cs"/>
         <a:sym typeface="Calibri"/>
       </a:defRPr>
     </a:lvl8pPr>
     <a:lvl9pPr indent="1828800" defTabSz="457200" latinLnBrk="0">
       <a:defRPr sz="1200">
-        <a:latin typeface="+mj-lt"/>
-        <a:ea typeface="+mj-ea"/>
-        <a:cs typeface="+mj-cs"/>
+        <a:latin typeface="+mn-lt"/>
+        <a:ea typeface="+mn-ea"/>
+        <a:cs typeface="+mn-cs"/>
         <a:sym typeface="Calibri"/>
       </a:defRPr>
     </a:lvl9pPr>
@@ -604,7 +604,7 @@
           <a:p>
             <a:pPr/>
             <a:r>
-              <a:t>Derived from the classification rules on the previous slide. The open record is exactly where TypeScript's Awaited is unsound; PromiseLike needs a rule for typed thenables, which neither design has.</a:t>
+              <a:t>Derived from the classification rules on the previous slide. The open record is exactly where TypeScript's Awaited is unsound; Awaiting a PromiseLike would adopt its then, which this design refuses on principle.</a:t>
             </a:r>
           </a:p>
         </p:txBody>
@@ -674,7 +674,7 @@
           <a:p>
             <a:pPr/>
             <a:r>
-              <a:t>The associated-result case and the number-bounded wrap verify end to end. The generic wrap with return await and back are recorded gaps. Every unsafe program is refused; eight negative cases are refused before their intended check, and are recorded as gaps too.</a:t>
+              <a:t>Each program is a pipeline case. The open record, the erasure and the 42 case are negative cases refused at their own obligations. The five gaps are refused before their intended check: generic function types, an ambient Awaited&lt;T&gt;, mutable associated-result storage and an unknown generic result.</a:t>
             </a:r>
           </a:p>
         </p:txBody>
@@ -744,7 +744,7 @@
           <a:p>
             <a:pPr/>
             <a:r>
-              <a:t>Before: skjs-coverage.json on verification/graph-core. The array unit verifies in the implementation's stable-await case. The census has not been rerun.</a:t>
+              <a:t>Both censuses are full runs with SKJS confirmation. Thenable adoption: awaiting a PromiseLike, or returning a fresh object from an async function, makes JavaScript call a then the type does not describe. keyof Promise&lt;number&gt; contains a unique symbol.</a:t>
             </a:r>
           </a:p>
         </p:txBody>
@@ -814,7 +814,7 @@
           <a:p>
             <a:pPr/>
             <a:r>
-              <a:t>The non-uniqueness comes from the narrow rule: number is below number | string, which resolves to itself. Only programs that need Awaited&lt;T&gt; to be at most a specific type are affected. The further rules are described in research/promise-coverage-audit.md.</a:t>
+              <a:t>The higher-order gaps are generic-promise-result-widening and invalid-generic-promise-erasure. The further rules are described in research/promise-coverage-audit.md.</a:t>
             </a:r>
           </a:p>
         </p:txBody>
@@ -1304,7 +1304,7 @@
           <a:p>
             <a:pPr/>
             <a:r>
-              <a:t>The elaborated signature is notation for what the implementation records: a type parameter with resolution slots (the fragment's resolution field, a resolution descriptor in the request). The implied-bounds rules are stated in SOURCE-CONTRACTS.md, section Implied bounds.</a:t>
+              <a:t>Awaitable and Resolvable are the verifier's own declarations, both unknown as types, in tools/resolvable.d.ts; the parser recognizes each by its declaration. Every resolvable type is awaitable. %PromiseResolve% : ∀X : Awaitable. (X) ⇒ Promise&lt;X.Observed&gt;. The implied-bounds rules are stated in SOURCE-CONTRACTS.md, section Implied bounds.</a:t>
             </a:r>
           </a:p>
         </p:txBody>
@@ -1374,7 +1374,7 @@
           <a:p>
             <a:pPr/>
             <a:r>
-              <a:t>These are the inductive relations Resolves and Observes in ResolutionCapabilities.lean, read as computing the associated types. A type with no classification, such as an open record, makes the call refused.</a:t>
+              <a:t>These are the inductive relations Observes and Resolves in ResolutionCapabilities.lean; the exactness lemmas are Observes.exact and Resolves.exact. A native promise is observable at any payload; its result needs the payload's result. A type with no classification, such as an open record, makes a call that needs its result refused.</a:t>
             </a:r>
           </a:p>
         </p:txBody>
@@ -2952,9 +2952,9 @@
             <a:srgbClr val="000000"/>
           </a:solidFill>
           <a:uFillTx/>
-          <a:latin typeface="+mj-lt"/>
-          <a:ea typeface="+mj-ea"/>
-          <a:cs typeface="+mj-cs"/>
+          <a:latin typeface="+mn-lt"/>
+          <a:ea typeface="+mn-ea"/>
+          <a:cs typeface="+mn-cs"/>
           <a:sym typeface="Calibri"/>
         </a:defRPr>
       </a:lvl1pPr>
@@ -2978,9 +2978,9 @@
             <a:srgbClr val="000000"/>
           </a:solidFill>
           <a:uFillTx/>
-          <a:latin typeface="+mj-lt"/>
-          <a:ea typeface="+mj-ea"/>
-          <a:cs typeface="+mj-cs"/>
+          <a:latin typeface="+mn-lt"/>
+          <a:ea typeface="+mn-ea"/>
+          <a:cs typeface="+mn-cs"/>
           <a:sym typeface="Calibri"/>
         </a:defRPr>
       </a:lvl2pPr>
@@ -3004,9 +3004,9 @@
             <a:srgbClr val="000000"/>
           </a:solidFill>
           <a:uFillTx/>
-          <a:latin typeface="+mj-lt"/>
-          <a:ea typeface="+mj-ea"/>
-          <a:cs typeface="+mj-cs"/>
+          <a:latin typeface="+mn-lt"/>
+          <a:ea typeface="+mn-ea"/>
+          <a:cs typeface="+mn-cs"/>
           <a:sym typeface="Calibri"/>
         </a:defRPr>
       </a:lvl3pPr>
@@ -3030,9 +3030,9 @@
             <a:srgbClr val="000000"/>
           </a:solidFill>
           <a:uFillTx/>
-          <a:latin typeface="+mj-lt"/>
-          <a:ea typeface="+mj-ea"/>
-          <a:cs typeface="+mj-cs"/>
+          <a:latin typeface="+mn-lt"/>
+          <a:ea typeface="+mn-ea"/>
+          <a:cs typeface="+mn-cs"/>
           <a:sym typeface="Calibri"/>
         </a:defRPr>
       </a:lvl4pPr>
@@ -3056,9 +3056,9 @@
             <a:srgbClr val="000000"/>
           </a:solidFill>
           <a:uFillTx/>
-          <a:latin typeface="+mj-lt"/>
-          <a:ea typeface="+mj-ea"/>
-          <a:cs typeface="+mj-cs"/>
+          <a:latin typeface="+mn-lt"/>
+          <a:ea typeface="+mn-ea"/>
+          <a:cs typeface="+mn-cs"/>
           <a:sym typeface="Calibri"/>
         </a:defRPr>
       </a:lvl5pPr>
@@ -3082,9 +3082,9 @@
             <a:srgbClr val="000000"/>
           </a:solidFill>
           <a:uFillTx/>
-          <a:latin typeface="+mj-lt"/>
-          <a:ea typeface="+mj-ea"/>
-          <a:cs typeface="+mj-cs"/>
+          <a:latin typeface="+mn-lt"/>
+          <a:ea typeface="+mn-ea"/>
+          <a:cs typeface="+mn-cs"/>
           <a:sym typeface="Calibri"/>
         </a:defRPr>
       </a:lvl6pPr>
@@ -3108,9 +3108,9 @@
             <a:srgbClr val="000000"/>
           </a:solidFill>
           <a:uFillTx/>
-          <a:latin typeface="+mj-lt"/>
-          <a:ea typeface="+mj-ea"/>
-          <a:cs typeface="+mj-cs"/>
+          <a:latin typeface="+mn-lt"/>
+          <a:ea typeface="+mn-ea"/>
+          <a:cs typeface="+mn-cs"/>
           <a:sym typeface="Calibri"/>
         </a:defRPr>
       </a:lvl7pPr>
@@ -3134,9 +3134,9 @@
             <a:srgbClr val="000000"/>
           </a:solidFill>
           <a:uFillTx/>
-          <a:latin typeface="+mj-lt"/>
-          <a:ea typeface="+mj-ea"/>
-          <a:cs typeface="+mj-cs"/>
+          <a:latin typeface="+mn-lt"/>
+          <a:ea typeface="+mn-ea"/>
+          <a:cs typeface="+mn-cs"/>
           <a:sym typeface="Calibri"/>
         </a:defRPr>
       </a:lvl8pPr>
@@ -3160,9 +3160,9 @@
             <a:srgbClr val="000000"/>
           </a:solidFill>
           <a:uFillTx/>
-          <a:latin typeface="+mj-lt"/>
-          <a:ea typeface="+mj-ea"/>
-          <a:cs typeface="+mj-cs"/>
+          <a:latin typeface="+mn-lt"/>
+          <a:ea typeface="+mn-ea"/>
+          <a:cs typeface="+mn-cs"/>
           <a:sym typeface="Calibri"/>
         </a:defRPr>
       </a:lvl9pPr>
@@ -3188,9 +3188,9 @@
             <a:srgbClr val="000000"/>
           </a:solidFill>
           <a:uFillTx/>
-          <a:latin typeface="+mj-lt"/>
-          <a:ea typeface="+mj-ea"/>
-          <a:cs typeface="+mj-cs"/>
+          <a:latin typeface="+mn-lt"/>
+          <a:ea typeface="+mn-ea"/>
+          <a:cs typeface="+mn-cs"/>
           <a:sym typeface="Calibri"/>
         </a:defRPr>
       </a:lvl1pPr>
@@ -3214,9 +3214,9 @@
             <a:srgbClr val="000000"/>
           </a:solidFill>
           <a:uFillTx/>
-          <a:latin typeface="+mj-lt"/>
-          <a:ea typeface="+mj-ea"/>
-          <a:cs typeface="+mj-cs"/>
+          <a:latin typeface="+mn-lt"/>
+          <a:ea typeface="+mn-ea"/>
+          <a:cs typeface="+mn-cs"/>
           <a:sym typeface="Calibri"/>
         </a:defRPr>
       </a:lvl2pPr>
@@ -3240,9 +3240,9 @@
             <a:srgbClr val="000000"/>
           </a:solidFill>
           <a:uFillTx/>
-          <a:latin typeface="+mj-lt"/>
-          <a:ea typeface="+mj-ea"/>
-          <a:cs typeface="+mj-cs"/>
+          <a:latin typeface="+mn-lt"/>
+          <a:ea typeface="+mn-ea"/>
+          <a:cs typeface="+mn-cs"/>
           <a:sym typeface="Calibri"/>
         </a:defRPr>
       </a:lvl3pPr>
@@ -3266,9 +3266,9 @@
             <a:srgbClr val="000000"/>
           </a:solidFill>
           <a:uFillTx/>
-          <a:latin typeface="+mj-lt"/>
-          <a:ea typeface="+mj-ea"/>
-          <a:cs typeface="+mj-cs"/>
+          <a:latin typeface="+mn-lt"/>
+          <a:ea typeface="+mn-ea"/>
+          <a:cs typeface="+mn-cs"/>
           <a:sym typeface="Calibri"/>
         </a:defRPr>
       </a:lvl4pPr>
@@ -3292,9 +3292,9 @@
             <a:srgbClr val="000000"/>
           </a:solidFill>
           <a:uFillTx/>
-          <a:latin typeface="+mj-lt"/>
-          <a:ea typeface="+mj-ea"/>
-          <a:cs typeface="+mj-cs"/>
+          <a:latin typeface="+mn-lt"/>
+          <a:ea typeface="+mn-ea"/>
+          <a:cs typeface="+mn-cs"/>
           <a:sym typeface="Calibri"/>
         </a:defRPr>
       </a:lvl5pPr>
@@ -3318,9 +3318,9 @@
             <a:srgbClr val="000000"/>
           </a:solidFill>
           <a:uFillTx/>
-          <a:latin typeface="+mj-lt"/>
-          <a:ea typeface="+mj-ea"/>
-          <a:cs typeface="+mj-cs"/>
+          <a:latin typeface="+mn-lt"/>
+          <a:ea typeface="+mn-ea"/>
+          <a:cs typeface="+mn-cs"/>
           <a:sym typeface="Calibri"/>
         </a:defRPr>
       </a:lvl6pPr>
@@ -3344,9 +3344,9 @@
             <a:srgbClr val="000000"/>
           </a:solidFill>
           <a:uFillTx/>
-          <a:latin typeface="+mj-lt"/>
-          <a:ea typeface="+mj-ea"/>
-          <a:cs typeface="+mj-cs"/>
+          <a:latin typeface="+mn-lt"/>
+          <a:ea typeface="+mn-ea"/>
+          <a:cs typeface="+mn-cs"/>
           <a:sym typeface="Calibri"/>
         </a:defRPr>
       </a:lvl7pPr>
@@ -3370,9 +3370,9 @@
             <a:srgbClr val="000000"/>
           </a:solidFill>
           <a:uFillTx/>
-          <a:latin typeface="+mj-lt"/>
-          <a:ea typeface="+mj-ea"/>
-          <a:cs typeface="+mj-cs"/>
+          <a:latin typeface="+mn-lt"/>
+          <a:ea typeface="+mn-ea"/>
+          <a:cs typeface="+mn-cs"/>
           <a:sym typeface="Calibri"/>
         </a:defRPr>
       </a:lvl8pPr>
@@ -3396,9 +3396,9 @@
             <a:srgbClr val="000000"/>
           </a:solidFill>
           <a:uFillTx/>
-          <a:latin typeface="+mj-lt"/>
-          <a:ea typeface="+mj-ea"/>
-          <a:cs typeface="+mj-cs"/>
+          <a:latin typeface="+mn-lt"/>
+          <a:ea typeface="+mn-ea"/>
+          <a:cs typeface="+mn-cs"/>
           <a:sym typeface="Calibri"/>
         </a:defRPr>
       </a:lvl9pPr>
@@ -4456,14 +4456,14 @@
     </a:clrScheme>
     <a:fontScheme name="Office Theme">
       <a:majorFont>
+        <a:latin typeface="Helvetica"/>
+        <a:ea typeface="Helvetica"/>
+        <a:cs typeface="Helvetica"/>
+      </a:majorFont>
+      <a:minorFont>
         <a:latin typeface="Calibri"/>
         <a:ea typeface="Calibri"/>
         <a:cs typeface="Calibri"/>
-      </a:majorFont>
-      <a:minorFont>
-        <a:latin typeface="Helvetica"/>
-        <a:ea typeface="Helvetica"/>
-        <a:cs typeface="Helvetica"/>
       </a:minorFont>
     </a:fontScheme>
     <a:fmtScheme name="Office Theme">
@@ -4668,9 +4668,9 @@
             </a:solidFill>
             <a:effectLst/>
             <a:uFillTx/>
-            <a:latin typeface="+mj-lt"/>
-            <a:ea typeface="+mj-ea"/>
-            <a:cs typeface="+mj-cs"/>
+            <a:latin typeface="+mn-lt"/>
+            <a:ea typeface="+mn-ea"/>
+            <a:cs typeface="+mn-cs"/>
             <a:sym typeface="Calibri"/>
           </a:defRPr>
         </a:defPPr>
@@ -5245,9 +5245,9 @@
             </a:solidFill>
             <a:effectLst/>
             <a:uFillTx/>
-            <a:latin typeface="+mj-lt"/>
-            <a:ea typeface="+mj-ea"/>
-            <a:cs typeface="+mj-cs"/>
+            <a:latin typeface="+mn-lt"/>
+            <a:ea typeface="+mn-ea"/>
+            <a:cs typeface="+mn-cs"/>
             <a:sym typeface="Calibri"/>
           </a:defRPr>
         </a:defPPr>
@@ -5540,14 +5540,14 @@
     </a:clrScheme>
     <a:fontScheme name="Office Theme">
       <a:majorFont>
+        <a:latin typeface="Helvetica"/>
+        <a:ea typeface="Helvetica"/>
+        <a:cs typeface="Helvetica"/>
+      </a:majorFont>
+      <a:minorFont>
         <a:latin typeface="Calibri"/>
         <a:ea typeface="Calibri"/>
         <a:cs typeface="Calibri"/>
-      </a:majorFont>
-      <a:minorFont>
-        <a:latin typeface="Helvetica"/>
-        <a:ea typeface="Helvetica"/>
-        <a:cs typeface="Helvetica"/>
       </a:minorFont>
     </a:fontScheme>
     <a:fmtScheme name="Office Theme">
@@ -5752,9 +5752,9 @@
             </a:solidFill>
             <a:effectLst/>
             <a:uFillTx/>
-            <a:latin typeface="+mj-lt"/>
-            <a:ea typeface="+mj-ea"/>
-            <a:cs typeface="+mj-cs"/>
+            <a:latin typeface="+mn-lt"/>
+            <a:ea typeface="+mn-ea"/>
+            <a:cs typeface="+mn-cs"/>
             <a:sym typeface="Calibri"/>
           </a:defRPr>
         </a:defPPr>
@@ -6329,9 +6329,9 @@
             </a:solidFill>
             <a:effectLst/>
             <a:uFillTx/>
-            <a:latin typeface="+mj-lt"/>
-            <a:ea typeface="+mj-ea"/>
-            <a:cs typeface="+mj-cs"/>
+            <a:latin typeface="+mn-lt"/>
+            <a:ea typeface="+mn-ea"/>
+            <a:cs typeface="+mn-cs"/>
             <a:sym typeface="Calibri"/>
           </a:defRPr>
         </a:defPPr>
